--- a/presentation/Copy of OATM_Project_Presentation.pptx
+++ b/presentation/Copy of OATM_Project_Presentation.pptx
@@ -8879,7 +8879,7 @@
                           </a:solidFill>
                           <a:latin typeface="Calibri"/>
                         </a:rPr>
-                        <a:t>Trade-off</a:t>
+                        <a:t>Video Understanding Capability</a:t>
                       </a:r>
                     </a:p>
                   </a:txBody>
@@ -8952,7 +8952,7 @@
                           </a:solidFill>
                           <a:latin typeface="Calibri"/>
                         </a:rPr>
-                        <a:t>Lowest cost; occlusion causes complete information loss</a:t>
+                        <a:t>No temporal reasoning by default — each frame is processed independently</a:t>
                       </a:r>
                     </a:p>
                   </a:txBody>
@@ -9061,7 +9061,7 @@
                           </a:solidFill>
                           <a:latin typeface="Calibri"/>
                         </a:rPr>
-                        <a:t>Occlusion-robust geometry; no color or texture, higher cost</a:t>
+                        <a:t>Tracks geometry continuously, but has no visual or semantic content to reason with</a:t>
                       </a:r>
                     </a:p>
                   </a:txBody>
@@ -9134,7 +9134,7 @@
                           </a:solidFill>
                           <a:latin typeface="Calibri"/>
                         </a:rPr>
-                        <a:t>Redundant viewpoints reduce occlusion; higher compute and calibration cost</a:t>
+                        <a:t>Wider visual context, but each stream is still typically processed frame by frame</a:t>
                       </a:r>
                     </a:p>
                   </a:txBody>
@@ -9207,7 +9207,7 @@
                           </a:solidFill>
                           <a:latin typeface="Calibri"/>
                         </a:rPr>
-                        <a:t>Most robust overall; highest cost and system complexity</a:t>
+                        <a:t>Richer combined signal, but reasoning over that signal across time is a separate, unsolved problem</a:t>
                       </a:r>
                     </a:p>
                   </a:txBody>
@@ -9280,7 +9280,7 @@
                           </a:solidFill>
                           <a:latin typeface="Calibri"/>
                         </a:rPr>
-                        <a:t>Aims to approach fusion-level robustness without extra sensors; not yet benchmarked</a:t>
+                        <a:t>Adds explicit video-level understanding: memory, motion, and occlusion-state reasoning across frames</a:t>
                       </a:r>
                     </a:p>
                   </a:txBody>
